--- a/gabarit.pptx
+++ b/gabarit.pptx
@@ -261,7 +261,7 @@
           <a:p>
             <a:fld id="{4147537A-4A9D-45D7-8CD2-A5BF0D7B3BAC}" type="datetimeFigureOut">
               <a:rPr lang="fr-CA" smtClean="0"/>
-              <a:t>2025-09-22</a:t>
+              <a:t>2026-06-02</a:t>
             </a:fld>
             <a:endParaRPr lang="fr-CA"/>
           </a:p>
@@ -461,7 +461,7 @@
           <a:p>
             <a:fld id="{4147537A-4A9D-45D7-8CD2-A5BF0D7B3BAC}" type="datetimeFigureOut">
               <a:rPr lang="fr-CA" smtClean="0"/>
-              <a:t>2025-09-22</a:t>
+              <a:t>2026-06-02</a:t>
             </a:fld>
             <a:endParaRPr lang="fr-CA"/>
           </a:p>
@@ -671,7 +671,7 @@
           <a:p>
             <a:fld id="{4147537A-4A9D-45D7-8CD2-A5BF0D7B3BAC}" type="datetimeFigureOut">
               <a:rPr lang="fr-CA" smtClean="0"/>
-              <a:t>2025-09-22</a:t>
+              <a:t>2026-06-02</a:t>
             </a:fld>
             <a:endParaRPr lang="fr-CA"/>
           </a:p>
@@ -871,7 +871,7 @@
           <a:p>
             <a:fld id="{4147537A-4A9D-45D7-8CD2-A5BF0D7B3BAC}" type="datetimeFigureOut">
               <a:rPr lang="fr-CA" smtClean="0"/>
-              <a:t>2025-09-22</a:t>
+              <a:t>2026-06-02</a:t>
             </a:fld>
             <a:endParaRPr lang="fr-CA"/>
           </a:p>
@@ -1147,7 +1147,7 @@
           <a:p>
             <a:fld id="{4147537A-4A9D-45D7-8CD2-A5BF0D7B3BAC}" type="datetimeFigureOut">
               <a:rPr lang="fr-CA" smtClean="0"/>
-              <a:t>2025-09-22</a:t>
+              <a:t>2026-06-02</a:t>
             </a:fld>
             <a:endParaRPr lang="fr-CA"/>
           </a:p>
@@ -1415,7 +1415,7 @@
           <a:p>
             <a:fld id="{4147537A-4A9D-45D7-8CD2-A5BF0D7B3BAC}" type="datetimeFigureOut">
               <a:rPr lang="fr-CA" smtClean="0"/>
-              <a:t>2025-09-22</a:t>
+              <a:t>2026-06-02</a:t>
             </a:fld>
             <a:endParaRPr lang="fr-CA"/>
           </a:p>
@@ -1830,7 +1830,7 @@
           <a:p>
             <a:fld id="{4147537A-4A9D-45D7-8CD2-A5BF0D7B3BAC}" type="datetimeFigureOut">
               <a:rPr lang="fr-CA" smtClean="0"/>
-              <a:t>2025-09-22</a:t>
+              <a:t>2026-06-02</a:t>
             </a:fld>
             <a:endParaRPr lang="fr-CA"/>
           </a:p>
@@ -1972,7 +1972,7 @@
           <a:p>
             <a:fld id="{4147537A-4A9D-45D7-8CD2-A5BF0D7B3BAC}" type="datetimeFigureOut">
               <a:rPr lang="fr-CA" smtClean="0"/>
-              <a:t>2025-09-22</a:t>
+              <a:t>2026-06-02</a:t>
             </a:fld>
             <a:endParaRPr lang="fr-CA"/>
           </a:p>
@@ -2085,7 +2085,7 @@
           <a:p>
             <a:fld id="{4147537A-4A9D-45D7-8CD2-A5BF0D7B3BAC}" type="datetimeFigureOut">
               <a:rPr lang="fr-CA" smtClean="0"/>
-              <a:t>2025-09-22</a:t>
+              <a:t>2026-06-02</a:t>
             </a:fld>
             <a:endParaRPr lang="fr-CA"/>
           </a:p>
@@ -2398,7 +2398,7 @@
           <a:p>
             <a:fld id="{4147537A-4A9D-45D7-8CD2-A5BF0D7B3BAC}" type="datetimeFigureOut">
               <a:rPr lang="fr-CA" smtClean="0"/>
-              <a:t>2025-09-22</a:t>
+              <a:t>2026-06-02</a:t>
             </a:fld>
             <a:endParaRPr lang="fr-CA"/>
           </a:p>
@@ -2687,7 +2687,7 @@
           <a:p>
             <a:fld id="{4147537A-4A9D-45D7-8CD2-A5BF0D7B3BAC}" type="datetimeFigureOut">
               <a:rPr lang="fr-CA" smtClean="0"/>
-              <a:t>2025-09-22</a:t>
+              <a:t>2026-06-02</a:t>
             </a:fld>
             <a:endParaRPr lang="fr-CA"/>
           </a:p>
@@ -2930,7 +2930,7 @@
           <a:p>
             <a:fld id="{4147537A-4A9D-45D7-8CD2-A5BF0D7B3BAC}" type="datetimeFigureOut">
               <a:rPr lang="fr-CA" smtClean="0"/>
-              <a:t>2025-09-22</a:t>
+              <a:t>2026-06-02</a:t>
             </a:fld>
             <a:endParaRPr lang="fr-CA"/>
           </a:p>
@@ -4058,6 +4058,42 @@
           <a:xfrm>
             <a:off x="-1660464" y="923951"/>
             <a:ext cx="4793660" cy="1022647"/>
+          </a:xfrm>
+          <a:prstGeom prst="rect">
+            <a:avLst/>
+          </a:prstGeom>
+        </p:spPr>
+      </p:pic>
+      <p:pic>
+        <p:nvPicPr>
+          <p:cNvPr id="4" name="Image 3">
+            <a:extLst>
+              <a:ext uri="{FF2B5EF4-FFF2-40B4-BE49-F238E27FC236}">
+                <a16:creationId xmlns:a16="http://schemas.microsoft.com/office/drawing/2014/main" id="{A962BC3D-4CC9-5941-167A-0DA47878C9D4}"/>
+              </a:ext>
+            </a:extLst>
+          </p:cNvPr>
+          <p:cNvPicPr>
+            <a:picLocks noChangeAspect="1"/>
+          </p:cNvPicPr>
+          <p:nvPr/>
+        </p:nvPicPr>
+        <p:blipFill>
+          <a:blip r:embed="rId18">
+            <a:extLst>
+              <a:ext uri="{28A0092B-C50C-407E-A947-70E740481C1C}">
+                <a14:useLocalDpi xmlns:a14="http://schemas.microsoft.com/office/drawing/2010/main" val="0"/>
+              </a:ext>
+            </a:extLst>
+          </a:blip>
+          <a:stretch>
+            <a:fillRect/>
+          </a:stretch>
+        </p:blipFill>
+        <p:spPr>
+          <a:xfrm>
+            <a:off x="-1723152" y="339821"/>
+            <a:ext cx="4719134" cy="1140458"/>
           </a:xfrm>
           <a:prstGeom prst="rect">
             <a:avLst/>
@@ -4393,21 +4429,6 @@
 </file>
 
 <file path=customXml/item1.xml><?xml version="1.0" encoding="utf-8"?>
-<p:properties xmlns:p="http://schemas.microsoft.com/office/2006/metadata/properties" xmlns:xsi="http://www.w3.org/2001/XMLSchema-instance" xmlns:pc="http://schemas.microsoft.com/office/infopath/2007/PartnerControls">
-  <documentManagement/>
-</p:properties>
-</file>
-
-<file path=customXml/item2.xml><?xml version="1.0" encoding="utf-8"?>
-<?mso-contentType ?>
-<FormTemplates xmlns="http://schemas.microsoft.com/sharepoint/v3/contenttype/forms">
-  <Display>DocumentLibraryForm</Display>
-  <Edit>DocumentLibraryForm</Edit>
-  <New>DocumentLibraryForm</New>
-</FormTemplates>
-</file>
-
-<file path=customXml/item3.xml><?xml version="1.0" encoding="utf-8"?>
 <ct:contentTypeSchema xmlns:ct="http://schemas.microsoft.com/office/2006/metadata/contentType" xmlns:ma="http://schemas.microsoft.com/office/2006/metadata/properties/metaAttributes" ct:_="" ma:_="" ma:contentTypeName="Document" ma:contentTypeID="0x01010069FDAFDC3D90CC4787991D4720C86E28" ma:contentTypeVersion="10" ma:contentTypeDescription="Crée un document." ma:contentTypeScope="" ma:versionID="c168363d1fb5e7eb406453f3514a0063">
   <xsd:schema xmlns:xsd="http://www.w3.org/2001/XMLSchema" xmlns:xs="http://www.w3.org/2001/XMLSchema" xmlns:p="http://schemas.microsoft.com/office/2006/metadata/properties" xmlns:ns3="bbd5305b-8e2c-4845-bc41-92e5abece376" targetNamespace="http://schemas.microsoft.com/office/2006/metadata/properties" ma:root="true" ma:fieldsID="fb2ed03a811508ce33e97b26169492bc" ns3:_="">
     <xsd:import namespace="bbd5305b-8e2c-4845-bc41-92e5abece376"/>
@@ -4589,31 +4610,22 @@
 </ct:contentTypeSchema>
 </file>
 
-<file path=customXml/itemProps1.xml><?xml version="1.0" encoding="utf-8"?>
-<ds:datastoreItem xmlns:ds="http://schemas.openxmlformats.org/officeDocument/2006/customXml" ds:itemID="{C1122E1A-31BE-4426-B3EB-2684D54C0032}">
-  <ds:schemaRefs>
-    <ds:schemaRef ds:uri="http://purl.org/dc/dcmitype/"/>
-    <ds:schemaRef ds:uri="http://purl.org/dc/terms/"/>
-    <ds:schemaRef ds:uri="http://www.w3.org/XML/1998/namespace"/>
-    <ds:schemaRef ds:uri="bbd5305b-8e2c-4845-bc41-92e5abece376"/>
-    <ds:schemaRef ds:uri="http://purl.org/dc/elements/1.1/"/>
-    <ds:schemaRef ds:uri="http://schemas.microsoft.com/office/2006/documentManagement/types"/>
-    <ds:schemaRef ds:uri="http://schemas.microsoft.com/office/infopath/2007/PartnerControls"/>
-    <ds:schemaRef ds:uri="http://schemas.openxmlformats.org/package/2006/metadata/core-properties"/>
-    <ds:schemaRef ds:uri="http://schemas.microsoft.com/office/2006/metadata/properties"/>
-  </ds:schemaRefs>
-</ds:datastoreItem>
+<file path=customXml/item2.xml><?xml version="1.0" encoding="utf-8"?>
+<?mso-contentType ?>
+<FormTemplates xmlns="http://schemas.microsoft.com/sharepoint/v3/contenttype/forms">
+  <Display>DocumentLibraryForm</Display>
+  <Edit>DocumentLibraryForm</Edit>
+  <New>DocumentLibraryForm</New>
+</FormTemplates>
 </file>
 
-<file path=customXml/itemProps2.xml><?xml version="1.0" encoding="utf-8"?>
-<ds:datastoreItem xmlns:ds="http://schemas.openxmlformats.org/officeDocument/2006/customXml" ds:itemID="{407E12A9-A4FD-44B1-B9CA-D425ECD9BD1A}">
-  <ds:schemaRefs>
-    <ds:schemaRef ds:uri="http://schemas.microsoft.com/sharepoint/v3/contenttype/forms"/>
-  </ds:schemaRefs>
-</ds:datastoreItem>
+<file path=customXml/item3.xml><?xml version="1.0" encoding="utf-8"?>
+<p:properties xmlns:p="http://schemas.microsoft.com/office/2006/metadata/properties" xmlns:xsi="http://www.w3.org/2001/XMLSchema-instance" xmlns:pc="http://schemas.microsoft.com/office/infopath/2007/PartnerControls">
+  <documentManagement/>
+</p:properties>
 </file>
 
-<file path=customXml/itemProps3.xml><?xml version="1.0" encoding="utf-8"?>
+<file path=customXml/itemProps1.xml><?xml version="1.0" encoding="utf-8"?>
 <ds:datastoreItem xmlns:ds="http://schemas.openxmlformats.org/officeDocument/2006/customXml" ds:itemID="{88920BE5-431C-437B-9B30-92713A625354}">
   <ds:schemaRefs>
     <ds:schemaRef ds:uri="http://schemas.microsoft.com/office/2006/metadata/contentType"/>
@@ -4629,4 +4641,28 @@
     <ds:schemaRef ds:uri="http://schemas.microsoft.com/internal/obd"/>
   </ds:schemaRefs>
 </ds:datastoreItem>
+</file>
+
+<file path=customXml/itemProps2.xml><?xml version="1.0" encoding="utf-8"?>
+<ds:datastoreItem xmlns:ds="http://schemas.openxmlformats.org/officeDocument/2006/customXml" ds:itemID="{407E12A9-A4FD-44B1-B9CA-D425ECD9BD1A}">
+  <ds:schemaRefs>
+    <ds:schemaRef ds:uri="http://schemas.microsoft.com/sharepoint/v3/contenttype/forms"/>
+  </ds:schemaRefs>
+</ds:datastoreItem>
+</file>
+
+<file path=customXml/itemProps3.xml><?xml version="1.0" encoding="utf-8"?>
+<ds:datastoreItem xmlns:ds="http://schemas.openxmlformats.org/officeDocument/2006/customXml" ds:itemID="{C1122E1A-31BE-4426-B3EB-2684D54C0032}">
+  <ds:schemaRefs>
+    <ds:schemaRef ds:uri="http://purl.org/dc/dcmitype/"/>
+    <ds:schemaRef ds:uri="http://purl.org/dc/terms/"/>
+    <ds:schemaRef ds:uri="http://www.w3.org/XML/1998/namespace"/>
+    <ds:schemaRef ds:uri="bbd5305b-8e2c-4845-bc41-92e5abece376"/>
+    <ds:schemaRef ds:uri="http://purl.org/dc/elements/1.1/"/>
+    <ds:schemaRef ds:uri="http://schemas.microsoft.com/office/2006/documentManagement/types"/>
+    <ds:schemaRef ds:uri="http://schemas.microsoft.com/office/infopath/2007/PartnerControls"/>
+    <ds:schemaRef ds:uri="http://schemas.openxmlformats.org/package/2006/metadata/core-properties"/>
+    <ds:schemaRef ds:uri="http://schemas.microsoft.com/office/2006/metadata/properties"/>
+  </ds:schemaRefs>
+</ds:datastoreItem>
 </file>